--- a/decks/geog-tectonic-hazards/geog-tectonic-hazards_ch6_living-with-risk.pptx
+++ b/decks/geog-tectonic-hazards/geog-tectonic-hazards_ch6_living-with-risk.pptx
@@ -126,31 +126,31 @@
   <p:extLst>
     <p:ext uri="{521415D9-36F7-43E2-AB2F-B90AF26B5E84}">
       <p14:sectionLst xmlns:p14="http://schemas.microsoft.com/office/powerpoint/2010/main">
-        <p14:section name="Opening" id="{29b74ee9-8ab7-6b82-ca1b-8f3cdc3550c9}">
+        <p14:section name="Opening" id="{b6280096-5c7f-79fa-5f85-0d2861335e99}">
           <p14:sldIdLst>
             <p14:sldId id="256"/>
           </p14:sldIdLst>
         </p14:section>
-        <p14:section name="Gate" id="{99ba5889-cfe7-35df-7edb-0c4350ab1a79}">
+        <p14:section name="Gate" id="{29a41389-ea41-c0bf-9623-f42f6c0c0605}">
           <p14:sldIdLst>
             <p14:sldId id="257"/>
             <p14:sldId id="258"/>
             <p14:sldId id="259"/>
           </p14:sldIdLst>
         </p14:section>
-        <p14:section name="Pre-teach" id="{f60a86dc-5876-de57-1bdd-9b3bdb17e633}">
+        <p14:section name="Pre-teach" id="{58788c12-064a-bb67-1d82-f90c489d6cf9}">
           <p14:sldIdLst>
             <p14:sldId id="260"/>
             <p14:sldId id="261"/>
           </p14:sldIdLst>
         </p14:section>
-        <p14:section name="Read-along" id="{8ff98408-1b3a-e403-2f57-0db12888130b}">
+        <p14:section name="Read-along" id="{92fb8621-168a-5e13-0e85-f10c51c39244}">
           <p14:sldIdLst>
             <p14:sldId id="262"/>
             <p14:sldId id="263"/>
           </p14:sldIdLst>
         </p14:section>
-        <p14:section name="Teach" id="{6bd0e601-86f1-3b9c-026b-1ff5dbfd16dd}">
+        <p14:section name="Teach" id="{110e9769-c4c9-aef9-157b-02cbd68bfe66}">
           <p14:sldIdLst>
             <p14:sldId id="264"/>
             <p14:sldId id="265"/>
@@ -159,19 +159,19 @@
             <p14:sldId id="268"/>
           </p14:sldIdLst>
         </p14:section>
-        <p14:section name="Routes" id="{c7709895-16e1-45a8-2078-b6193cb3ff49}">
+        <p14:section name="Routes" id="{d866f24f-77f3-d04e-86be-dd45b0011587}">
           <p14:sldIdLst>
             <p14:sldId id="269"/>
             <p14:sldId id="270"/>
             <p14:sldId id="271"/>
           </p14:sldIdLst>
         </p14:section>
-        <p14:section name="Close" id="{726b4f96-b096-780b-ee89-76e87ff7bb6a}">
+        <p14:section name="Close" id="{f4a39048-2b95-1890-3cf0-226b0daa293e}">
           <p14:sldIdLst>
             <p14:sldId id="272"/>
           </p14:sldIdLst>
         </p14:section>
-        <p14:section name="Answers" id="{3a4746af-892b-f322-be20-d74f6f21f306}">
+        <p14:section name="Answers" id="{1be4e39d-8aec-333f-26c5-8bd1aeac6839}">
           <p14:sldIdLst>
             <p14:sldId id="273"/>
             <p14:sldId id="274"/>
@@ -2350,7 +2350,7 @@
             <a:r>
               <a:rPr lang="en-US" dirty="0"/>
               <a:t>Teach — Living in the shadow of volcanoes. Say it in your own words, then check understanding with a quick question: ask a pupil from the pre-teach group first, since they met these words and ideas before the lesson. Pupils try to recall before you re-explain.
-Tomatoes grow on the slopes of Mount Vesuvius in Italy because the soil, made from volcanic ash, is so fertile. That one fact opens the question your class debated: why do people expose themselves to the risk of living near a volcano? The deck gives four benefits. Fertile soil for farming. Renewable and cheaper energy, because geothermal heat from underground can generate electricity. Durable construction materials from volcanic rock. And jobs from tourism, because people travel a long way to see a volcano.
+Tomatoes grow on the slopes of Mount Vesuvius in Italy because the soil, made from volcanic ash, is so fertile. That one fact opens the question your class debated: why do people expose themselves to the risk of living near a volcano? Your lesson gives four benefits. Fertile soil for farming. Renewable and cheaper energy, because geothermal heat from underground can generate electricity. Durable construction materials from volcanic rock. And jobs from tourism, because people travel a long way to see a volcano.
 Your case studies were Hawaii and Iceland, and they are volcanic for different reasons. Iceland sits on a constructive margin, the Mid-Atlantic Ridge, where the North American and Eurasian plates pull apart and magma rises between them. Hawaii sits in the middle of the Pacific plate, far from any boundary, above a hot spot where a plume of very hot mantle rises and burns through the plate. Both are also hot spots in the everyday sense: geothermal energy heats homes and pools and powers the electricity grid, and tourism brings in money.
 The task asked whether you would rather live in Hawaii or Iceland, and to what extent a volcano is a blessing to each. Build your judgement from the benefits sorted into economic (energy, building materials, farming income, tourist jobs) and environmental (fertile soil, geothermal heat), set against the risks: eruptions, poisonous gases and the chance that the land you farm is buried in ash.
 Tip: Learn the four benefits as a list: soil, energy, building materials, tourism. Then attach each to Hawaii or Iceland for a located answer.</a:t>
